--- a/ppt/비움_하드웨어_양산로드맵.pptx
+++ b/ppt/비움_하드웨어_양산로드맵.pptx
@@ -999,9 +999,9 @@
                 <a:solidFill>
                   <a:srgbClr val="9DB7D4"/>
                 </a:solidFill>
-                <a:latin typeface="Arial Unicode MS" pitchFamily="34" charset="0"/>
-                <a:ea typeface="Arial Unicode MS" pitchFamily="34" charset="-122"/>
-                <a:cs typeface="Arial Unicode MS" pitchFamily="34" charset="-120"/>
+                <a:latin typeface="Apple SD Gothic Neo" pitchFamily="34" charset="0"/>
+                <a:ea typeface="Apple SD Gothic Neo" pitchFamily="34" charset="-122"/>
+                <a:cs typeface="Apple SD Gothic Neo" pitchFamily="34" charset="-120"/>
               </a:rPr>
               <a:t>HARDWARE STRATEGY</a:t>
             </a:r>
@@ -1040,9 +1040,9 @@
                 <a:solidFill>
                   <a:srgbClr val="9DB7D4"/>
                 </a:solidFill>
-                <a:latin typeface="Arial Unicode MS" pitchFamily="34" charset="0"/>
-                <a:ea typeface="Arial Unicode MS" pitchFamily="34" charset="-122"/>
-                <a:cs typeface="Arial Unicode MS" pitchFamily="34" charset="-120"/>
+                <a:latin typeface="Apple SD Gothic Neo" pitchFamily="34" charset="0"/>
+                <a:ea typeface="Apple SD Gothic Neo" pitchFamily="34" charset="-122"/>
+                <a:cs typeface="Apple SD Gothic Neo" pitchFamily="34" charset="-120"/>
               </a:rPr>
               <a:t>BEUM  /  01</a:t>
             </a:r>
@@ -1168,9 +1168,9 @@
                 <a:solidFill>
                   <a:srgbClr val="FFFFFF"/>
                 </a:solidFill>
-                <a:latin typeface="Arial Unicode MS" pitchFamily="34" charset="0"/>
-                <a:ea typeface="Arial Unicode MS" pitchFamily="34" charset="-122"/>
-                <a:cs typeface="Arial Unicode MS" pitchFamily="34" charset="-120"/>
+                <a:latin typeface="Apple SD Gothic Neo" pitchFamily="34" charset="0"/>
+                <a:ea typeface="Apple SD Gothic Neo" pitchFamily="34" charset="-122"/>
+                <a:cs typeface="Apple SD Gothic Neo" pitchFamily="34" charset="-120"/>
               </a:rPr>
               <a:t>시연을 위한 선택,</a:t>
             </a:r>
@@ -1185,9 +1185,9 @@
                 <a:solidFill>
                   <a:srgbClr val="FFFFFF"/>
                 </a:solidFill>
-                <a:latin typeface="Arial Unicode MS" pitchFamily="34" charset="0"/>
-                <a:ea typeface="Arial Unicode MS" pitchFamily="34" charset="-122"/>
-                <a:cs typeface="Arial Unicode MS" pitchFamily="34" charset="-120"/>
+                <a:latin typeface="Apple SD Gothic Neo" pitchFamily="34" charset="0"/>
+                <a:ea typeface="Apple SD Gothic Neo" pitchFamily="34" charset="-122"/>
+                <a:cs typeface="Apple SD Gothic Neo" pitchFamily="34" charset="-120"/>
               </a:rPr>
               <a:t>현장을 위한 다음 단계</a:t>
             </a:r>
@@ -1226,9 +1226,9 @@
                 <a:solidFill>
                   <a:srgbClr val="C9D8E8"/>
                 </a:solidFill>
-                <a:latin typeface="Arial Unicode MS" pitchFamily="34" charset="0"/>
-                <a:ea typeface="Arial Unicode MS" pitchFamily="34" charset="-122"/>
-                <a:cs typeface="Arial Unicode MS" pitchFamily="34" charset="-120"/>
+                <a:latin typeface="Apple SD Gothic Neo" pitchFamily="34" charset="0"/>
+                <a:ea typeface="Apple SD Gothic Neo" pitchFamily="34" charset="-122"/>
+                <a:cs typeface="Apple SD Gothic Neo" pitchFamily="34" charset="-120"/>
               </a:rPr>
               <a:t>비움의 하드웨어는 “완제품”보다</a:t>
             </a:r>
@@ -1243,9 +1243,9 @@
                 <a:solidFill>
                   <a:srgbClr val="C9D8E8"/>
                 </a:solidFill>
-                <a:latin typeface="Arial Unicode MS" pitchFamily="34" charset="0"/>
-                <a:ea typeface="Arial Unicode MS" pitchFamily="34" charset="-122"/>
-                <a:cs typeface="Arial Unicode MS" pitchFamily="34" charset="-120"/>
+                <a:latin typeface="Apple SD Gothic Neo" pitchFamily="34" charset="0"/>
+                <a:ea typeface="Apple SD Gothic Neo" pitchFamily="34" charset="-122"/>
+                <a:cs typeface="Apple SD Gothic Neo" pitchFamily="34" charset="-120"/>
               </a:rPr>
               <a:t>“가능성 검증”을 먼저 목표로 설계했습니다.</a:t>
             </a:r>
@@ -1307,9 +1307,9 @@
                 <a:solidFill>
                   <a:srgbClr val="F2B544"/>
                 </a:solidFill>
-                <a:latin typeface="Arial Unicode MS" pitchFamily="34" charset="0"/>
-                <a:ea typeface="Arial Unicode MS" pitchFamily="34" charset="-122"/>
-                <a:cs typeface="Arial Unicode MS" pitchFamily="34" charset="-120"/>
+                <a:latin typeface="Apple SD Gothic Neo" pitchFamily="34" charset="0"/>
+                <a:ea typeface="Apple SD Gothic Neo" pitchFamily="34" charset="-122"/>
+                <a:cs typeface="Apple SD Gothic Neo" pitchFamily="34" charset="-120"/>
               </a:rPr>
               <a:t>빠르게 만들고, 실제로 확인한다.</a:t>
             </a:r>
@@ -1348,9 +1348,9 @@
                 <a:solidFill>
                   <a:srgbClr val="9DB7D4"/>
                 </a:solidFill>
-                <a:latin typeface="Arial Unicode MS" pitchFamily="34" charset="0"/>
-                <a:ea typeface="Arial Unicode MS" pitchFamily="34" charset="-122"/>
-                <a:cs typeface="Arial Unicode MS" pitchFamily="34" charset="-120"/>
+                <a:latin typeface="Apple SD Gothic Neo" pitchFamily="34" charset="0"/>
+                <a:ea typeface="Apple SD Gothic Neo" pitchFamily="34" charset="-122"/>
+                <a:cs typeface="Apple SD Gothic Neo" pitchFamily="34" charset="-120"/>
               </a:rPr>
               <a:t>시연 단계에서 검증한 범위</a:t>
             </a:r>
@@ -1389,9 +1389,9 @@
                 <a:solidFill>
                   <a:srgbClr val="FFFFFF"/>
                 </a:solidFill>
-                <a:latin typeface="Arial Unicode MS" pitchFamily="34" charset="0"/>
-                <a:ea typeface="Arial Unicode MS" pitchFamily="34" charset="-122"/>
-                <a:cs typeface="Arial Unicode MS" pitchFamily="34" charset="-120"/>
+                <a:latin typeface="Apple SD Gothic Neo" pitchFamily="34" charset="0"/>
+                <a:ea typeface="Apple SD Gothic Neo" pitchFamily="34" charset="-122"/>
+                <a:cs typeface="Apple SD Gothic Neo" pitchFamily="34" charset="-120"/>
               </a:rPr>
               <a:t>탐지  →  위치 기록  →  서버 전송</a:t>
             </a:r>
@@ -1430,9 +1430,9 @@
                 <a:solidFill>
                   <a:srgbClr val="9DB7D4"/>
                 </a:solidFill>
-                <a:latin typeface="Arial Unicode MS" pitchFamily="34" charset="0"/>
-                <a:ea typeface="Arial Unicode MS" pitchFamily="34" charset="-122"/>
-                <a:cs typeface="Arial Unicode MS" pitchFamily="34" charset="-120"/>
+                <a:latin typeface="Apple SD Gothic Neo" pitchFamily="34" charset="0"/>
+                <a:ea typeface="Apple SD Gothic Neo" pitchFamily="34" charset="-122"/>
+                <a:cs typeface="Apple SD Gothic Neo" pitchFamily="34" charset="-120"/>
               </a:rPr>
               <a:t>범용 부품으로 기능 흐름과 현장 데이터를 먼저 확보했습니다.</a:t>
             </a:r>
@@ -1500,9 +1500,9 @@
                 <a:solidFill>
                   <a:srgbClr val="2B77E5"/>
                 </a:solidFill>
-                <a:latin typeface="Arial Unicode MS" pitchFamily="34" charset="0"/>
-                <a:ea typeface="Arial Unicode MS" pitchFamily="34" charset="-122"/>
-                <a:cs typeface="Arial Unicode MS" pitchFamily="34" charset="-120"/>
+                <a:latin typeface="Apple SD Gothic Neo" pitchFamily="34" charset="0"/>
+                <a:ea typeface="Apple SD Gothic Neo" pitchFamily="34" charset="-122"/>
+                <a:cs typeface="Apple SD Gothic Neo" pitchFamily="34" charset="-120"/>
               </a:rPr>
               <a:t>현재 시연 구성</a:t>
             </a:r>
@@ -1541,9 +1541,9 @@
                 <a:solidFill>
                   <a:srgbClr val="0D2138"/>
                 </a:solidFill>
-                <a:latin typeface="Arial Unicode MS" pitchFamily="34" charset="0"/>
-                <a:ea typeface="Arial Unicode MS" pitchFamily="34" charset="-122"/>
-                <a:cs typeface="Arial Unicode MS" pitchFamily="34" charset="-120"/>
+                <a:latin typeface="Apple SD Gothic Neo" pitchFamily="34" charset="0"/>
+                <a:ea typeface="Apple SD Gothic Neo" pitchFamily="34" charset="-122"/>
+                <a:cs typeface="Apple SD Gothic Neo" pitchFamily="34" charset="-120"/>
               </a:rPr>
               <a:t>저비용·빠른 제작·기능 검증</a:t>
             </a:r>
@@ -1713,9 +1713,9 @@
                 <a:solidFill>
                   <a:srgbClr val="0D2138"/>
                 </a:solidFill>
-                <a:latin typeface="Arial Unicode MS" pitchFamily="34" charset="0"/>
-                <a:ea typeface="Arial Unicode MS" pitchFamily="34" charset="-122"/>
-                <a:cs typeface="Arial Unicode MS" pitchFamily="34" charset="-120"/>
+                <a:latin typeface="Apple SD Gothic Neo" pitchFamily="34" charset="0"/>
+                <a:ea typeface="Apple SD Gothic Neo" pitchFamily="34" charset="-122"/>
+                <a:cs typeface="Apple SD Gothic Neo" pitchFamily="34" charset="-120"/>
               </a:rPr>
               <a:t>카메라</a:t>
             </a:r>
@@ -1754,9 +1754,9 @@
                 <a:solidFill>
                   <a:srgbClr val="66758A"/>
                 </a:solidFill>
-                <a:latin typeface="Arial Unicode MS" pitchFamily="34" charset="0"/>
-                <a:ea typeface="Arial Unicode MS" pitchFamily="34" charset="-122"/>
-                <a:cs typeface="Arial Unicode MS" pitchFamily="34" charset="-120"/>
+                <a:latin typeface="Apple SD Gothic Neo" pitchFamily="34" charset="0"/>
+                <a:ea typeface="Apple SD Gothic Neo" pitchFamily="34" charset="-122"/>
+                <a:cs typeface="Apple SD Gothic Neo" pitchFamily="34" charset="-120"/>
               </a:rPr>
               <a:t>영상 수집</a:t>
             </a:r>
@@ -1989,9 +1989,9 @@
                 <a:solidFill>
                   <a:srgbClr val="0D2138"/>
                 </a:solidFill>
-                <a:latin typeface="Arial Unicode MS" pitchFamily="34" charset="0"/>
-                <a:ea typeface="Arial Unicode MS" pitchFamily="34" charset="-122"/>
-                <a:cs typeface="Arial Unicode MS" pitchFamily="34" charset="-120"/>
+                <a:latin typeface="Apple SD Gothic Neo" pitchFamily="34" charset="0"/>
+                <a:ea typeface="Apple SD Gothic Neo" pitchFamily="34" charset="-122"/>
+                <a:cs typeface="Apple SD Gothic Neo" pitchFamily="34" charset="-120"/>
               </a:rPr>
               <a:t>라즈베리파이</a:t>
             </a:r>
@@ -2030,9 +2030,9 @@
                 <a:solidFill>
                   <a:srgbClr val="66758A"/>
                 </a:solidFill>
-                <a:latin typeface="Arial Unicode MS" pitchFamily="34" charset="0"/>
-                <a:ea typeface="Arial Unicode MS" pitchFamily="34" charset="-122"/>
-                <a:cs typeface="Arial Unicode MS" pitchFamily="34" charset="-120"/>
+                <a:latin typeface="Apple SD Gothic Neo" pitchFamily="34" charset="0"/>
+                <a:ea typeface="Apple SD Gothic Neo" pitchFamily="34" charset="-122"/>
+                <a:cs typeface="Apple SD Gothic Neo" pitchFamily="34" charset="-120"/>
               </a:rPr>
               <a:t>엣지 처리</a:t>
             </a:r>
@@ -2177,9 +2177,9 @@
                 <a:solidFill>
                   <a:srgbClr val="0D2138"/>
                 </a:solidFill>
-                <a:latin typeface="Arial Unicode MS" pitchFamily="34" charset="0"/>
-                <a:ea typeface="Arial Unicode MS" pitchFamily="34" charset="-122"/>
-                <a:cs typeface="Arial Unicode MS" pitchFamily="34" charset="-120"/>
+                <a:latin typeface="Apple SD Gothic Neo" pitchFamily="34" charset="0"/>
+                <a:ea typeface="Apple SD Gothic Neo" pitchFamily="34" charset="-122"/>
+                <a:cs typeface="Apple SD Gothic Neo" pitchFamily="34" charset="-120"/>
               </a:rPr>
               <a:t>GPS</a:t>
             </a:r>
@@ -2218,9 +2218,9 @@
                 <a:solidFill>
                   <a:srgbClr val="66758A"/>
                 </a:solidFill>
-                <a:latin typeface="Arial Unicode MS" pitchFamily="34" charset="0"/>
-                <a:ea typeface="Arial Unicode MS" pitchFamily="34" charset="-122"/>
-                <a:cs typeface="Arial Unicode MS" pitchFamily="34" charset="-120"/>
+                <a:latin typeface="Apple SD Gothic Neo" pitchFamily="34" charset="0"/>
+                <a:ea typeface="Apple SD Gothic Neo" pitchFamily="34" charset="-122"/>
+                <a:cs typeface="Apple SD Gothic Neo" pitchFamily="34" charset="-120"/>
               </a:rPr>
               <a:t>위치 기록</a:t>
             </a:r>
@@ -2400,9 +2400,9 @@
                 <a:solidFill>
                   <a:srgbClr val="0D2138"/>
                 </a:solidFill>
-                <a:latin typeface="Arial Unicode MS" pitchFamily="34" charset="0"/>
-                <a:ea typeface="Arial Unicode MS" pitchFamily="34" charset="-122"/>
-                <a:cs typeface="Arial Unicode MS" pitchFamily="34" charset="-120"/>
+                <a:latin typeface="Apple SD Gothic Neo" pitchFamily="34" charset="0"/>
+                <a:ea typeface="Apple SD Gothic Neo" pitchFamily="34" charset="-122"/>
+                <a:cs typeface="Apple SD Gothic Neo" pitchFamily="34" charset="-120"/>
               </a:rPr>
               <a:t>서버</a:t>
             </a:r>
@@ -2441,9 +2441,9 @@
                 <a:solidFill>
                   <a:srgbClr val="66758A"/>
                 </a:solidFill>
-                <a:latin typeface="Arial Unicode MS" pitchFamily="34" charset="0"/>
-                <a:ea typeface="Arial Unicode MS" pitchFamily="34" charset="-122"/>
-                <a:cs typeface="Arial Unicode MS" pitchFamily="34" charset="-120"/>
+                <a:latin typeface="Apple SD Gothic Neo" pitchFamily="34" charset="0"/>
+                <a:ea typeface="Apple SD Gothic Neo" pitchFamily="34" charset="-122"/>
+                <a:cs typeface="Apple SD Gothic Neo" pitchFamily="34" charset="-120"/>
               </a:rPr>
               <a:t>이벤트 저장</a:t>
             </a:r>
@@ -2583,9 +2583,9 @@
                 <a:solidFill>
                   <a:srgbClr val="2B77E5"/>
                 </a:solidFill>
-                <a:latin typeface="Arial Unicode MS" pitchFamily="34" charset="0"/>
-                <a:ea typeface="Arial Unicode MS" pitchFamily="34" charset="-122"/>
-                <a:cs typeface="Arial Unicode MS" pitchFamily="34" charset="-120"/>
+                <a:latin typeface="Apple SD Gothic Neo" pitchFamily="34" charset="0"/>
+                <a:ea typeface="Apple SD Gothic Neo" pitchFamily="34" charset="-122"/>
+                <a:cs typeface="Apple SD Gothic Neo" pitchFamily="34" charset="-120"/>
               </a:rPr>
               <a:t>빠른 제작</a:t>
             </a:r>
@@ -2653,9 +2653,9 @@
                 <a:solidFill>
                   <a:srgbClr val="12B6A4"/>
                 </a:solidFill>
-                <a:latin typeface="Arial Unicode MS" pitchFamily="34" charset="0"/>
-                <a:ea typeface="Arial Unicode MS" pitchFamily="34" charset="-122"/>
-                <a:cs typeface="Arial Unicode MS" pitchFamily="34" charset="-120"/>
+                <a:latin typeface="Apple SD Gothic Neo" pitchFamily="34" charset="0"/>
+                <a:ea typeface="Apple SD Gothic Neo" pitchFamily="34" charset="-122"/>
+                <a:cs typeface="Apple SD Gothic Neo" pitchFamily="34" charset="-120"/>
               </a:rPr>
               <a:t>낮은 비용</a:t>
             </a:r>
@@ -2723,9 +2723,9 @@
                 <a:solidFill>
                   <a:srgbClr val="946A00"/>
                 </a:solidFill>
-                <a:latin typeface="Arial Unicode MS" pitchFamily="34" charset="0"/>
-                <a:ea typeface="Arial Unicode MS" pitchFamily="34" charset="-122"/>
-                <a:cs typeface="Arial Unicode MS" pitchFamily="34" charset="-120"/>
+                <a:latin typeface="Apple SD Gothic Neo" pitchFamily="34" charset="0"/>
+                <a:ea typeface="Apple SD Gothic Neo" pitchFamily="34" charset="-122"/>
+                <a:cs typeface="Apple SD Gothic Neo" pitchFamily="34" charset="-120"/>
               </a:rPr>
               <a:t>현장 데이터</a:t>
             </a:r>
@@ -2787,9 +2787,9 @@
                 <a:solidFill>
                   <a:srgbClr val="E66964"/>
                 </a:solidFill>
-                <a:latin typeface="Arial Unicode MS" pitchFamily="34" charset="0"/>
-                <a:ea typeface="Arial Unicode MS" pitchFamily="34" charset="-122"/>
-                <a:cs typeface="Arial Unicode MS" pitchFamily="34" charset="-120"/>
+                <a:latin typeface="Apple SD Gothic Neo" pitchFamily="34" charset="0"/>
+                <a:ea typeface="Apple SD Gothic Neo" pitchFamily="34" charset="-122"/>
+                <a:cs typeface="Apple SD Gothic Neo" pitchFamily="34" charset="-120"/>
               </a:rPr>
               <a:t>현실적 한계</a:t>
             </a:r>
@@ -2857,9 +2857,9 @@
                 <a:solidFill>
                   <a:srgbClr val="E66964"/>
                 </a:solidFill>
-                <a:latin typeface="Arial Unicode MS" pitchFamily="34" charset="0"/>
-                <a:ea typeface="Arial Unicode MS" pitchFamily="34" charset="-122"/>
-                <a:cs typeface="Arial Unicode MS" pitchFamily="34" charset="-120"/>
+                <a:latin typeface="Apple SD Gothic Neo" pitchFamily="34" charset="0"/>
+                <a:ea typeface="Apple SD Gothic Neo" pitchFamily="34" charset="-122"/>
+                <a:cs typeface="Apple SD Gothic Neo" pitchFamily="34" charset="-120"/>
               </a:rPr>
               <a:t>01</a:t>
             </a:r>
@@ -2898,9 +2898,9 @@
                 <a:solidFill>
                   <a:srgbClr val="0D2138"/>
                 </a:solidFill>
-                <a:latin typeface="Arial Unicode MS" pitchFamily="34" charset="0"/>
-                <a:ea typeface="Arial Unicode MS" pitchFamily="34" charset="-122"/>
-                <a:cs typeface="Arial Unicode MS" pitchFamily="34" charset="-120"/>
+                <a:latin typeface="Apple SD Gothic Neo" pitchFamily="34" charset="0"/>
+                <a:ea typeface="Apple SD Gothic Neo" pitchFamily="34" charset="-122"/>
+                <a:cs typeface="Apple SD Gothic Neo" pitchFamily="34" charset="-120"/>
               </a:rPr>
               <a:t>시야 가림</a:t>
             </a:r>
@@ -2939,9 +2939,9 @@
                 <a:solidFill>
                   <a:srgbClr val="66758A"/>
                 </a:solidFill>
-                <a:latin typeface="Arial Unicode MS" pitchFamily="34" charset="0"/>
-                <a:ea typeface="Arial Unicode MS" pitchFamily="34" charset="-122"/>
-                <a:cs typeface="Arial Unicode MS" pitchFamily="34" charset="-120"/>
+                <a:latin typeface="Apple SD Gothic Neo" pitchFamily="34" charset="0"/>
+                <a:ea typeface="Apple SD Gothic Neo" pitchFamily="34" charset="-122"/>
+                <a:cs typeface="Apple SD Gothic Neo" pitchFamily="34" charset="-120"/>
               </a:rPr>
               <a:t>차량·사람·각도</a:t>
             </a:r>
@@ -3009,9 +3009,9 @@
                 <a:solidFill>
                   <a:srgbClr val="E66964"/>
                 </a:solidFill>
-                <a:latin typeface="Arial Unicode MS" pitchFamily="34" charset="0"/>
-                <a:ea typeface="Arial Unicode MS" pitchFamily="34" charset="-122"/>
-                <a:cs typeface="Arial Unicode MS" pitchFamily="34" charset="-120"/>
+                <a:latin typeface="Apple SD Gothic Neo" pitchFamily="34" charset="0"/>
+                <a:ea typeface="Apple SD Gothic Neo" pitchFamily="34" charset="-122"/>
+                <a:cs typeface="Apple SD Gothic Neo" pitchFamily="34" charset="-120"/>
               </a:rPr>
               <a:t>02</a:t>
             </a:r>
@@ -3050,9 +3050,9 @@
                 <a:solidFill>
                   <a:srgbClr val="0D2138"/>
                 </a:solidFill>
-                <a:latin typeface="Arial Unicode MS" pitchFamily="34" charset="0"/>
-                <a:ea typeface="Arial Unicode MS" pitchFamily="34" charset="-122"/>
-                <a:cs typeface="Arial Unicode MS" pitchFamily="34" charset="-120"/>
+                <a:latin typeface="Apple SD Gothic Neo" pitchFamily="34" charset="0"/>
+                <a:ea typeface="Apple SD Gothic Neo" pitchFamily="34" charset="-122"/>
+                <a:cs typeface="Apple SD Gothic Neo" pitchFamily="34" charset="-120"/>
               </a:rPr>
               <a:t>우천·야간</a:t>
             </a:r>
@@ -3091,9 +3091,9 @@
                 <a:solidFill>
                   <a:srgbClr val="66758A"/>
                 </a:solidFill>
-                <a:latin typeface="Arial Unicode MS" pitchFamily="34" charset="0"/>
-                <a:ea typeface="Arial Unicode MS" pitchFamily="34" charset="-122"/>
-                <a:cs typeface="Arial Unicode MS" pitchFamily="34" charset="-120"/>
+                <a:latin typeface="Apple SD Gothic Neo" pitchFamily="34" charset="0"/>
+                <a:ea typeface="Apple SD Gothic Neo" pitchFamily="34" charset="-122"/>
+                <a:cs typeface="Apple SD Gothic Neo" pitchFamily="34" charset="-120"/>
               </a:rPr>
               <a:t>화질·반사·물방울</a:t>
             </a:r>
@@ -3161,9 +3161,9 @@
                 <a:solidFill>
                   <a:srgbClr val="E66964"/>
                 </a:solidFill>
-                <a:latin typeface="Arial Unicode MS" pitchFamily="34" charset="0"/>
-                <a:ea typeface="Arial Unicode MS" pitchFamily="34" charset="-122"/>
-                <a:cs typeface="Arial Unicode MS" pitchFamily="34" charset="-120"/>
+                <a:latin typeface="Apple SD Gothic Neo" pitchFamily="34" charset="0"/>
+                <a:ea typeface="Apple SD Gothic Neo" pitchFamily="34" charset="-122"/>
+                <a:cs typeface="Apple SD Gothic Neo" pitchFamily="34" charset="-120"/>
               </a:rPr>
               <a:t>03</a:t>
             </a:r>
@@ -3202,9 +3202,9 @@
                 <a:solidFill>
                   <a:srgbClr val="0D2138"/>
                 </a:solidFill>
-                <a:latin typeface="Arial Unicode MS" pitchFamily="34" charset="0"/>
-                <a:ea typeface="Arial Unicode MS" pitchFamily="34" charset="-122"/>
-                <a:cs typeface="Arial Unicode MS" pitchFamily="34" charset="-120"/>
+                <a:latin typeface="Apple SD Gothic Neo" pitchFamily="34" charset="0"/>
+                <a:ea typeface="Apple SD Gothic Neo" pitchFamily="34" charset="-122"/>
+                <a:cs typeface="Apple SD Gothic Neo" pitchFamily="34" charset="-120"/>
               </a:rPr>
               <a:t>야외 내구성</a:t>
             </a:r>
@@ -3243,9 +3243,9 @@
                 <a:solidFill>
                   <a:srgbClr val="66758A"/>
                 </a:solidFill>
-                <a:latin typeface="Arial Unicode MS" pitchFamily="34" charset="0"/>
-                <a:ea typeface="Arial Unicode MS" pitchFamily="34" charset="-122"/>
-                <a:cs typeface="Arial Unicode MS" pitchFamily="34" charset="-120"/>
+                <a:latin typeface="Apple SD Gothic Neo" pitchFamily="34" charset="0"/>
+                <a:ea typeface="Apple SD Gothic Neo" pitchFamily="34" charset="-122"/>
+                <a:cs typeface="Apple SD Gothic Neo" pitchFamily="34" charset="-120"/>
               </a:rPr>
               <a:t>전원·방수·통신</a:t>
             </a:r>
@@ -3284,9 +3284,9 @@
                 <a:solidFill>
                   <a:srgbClr val="9AA7B7"/>
                 </a:solidFill>
-                <a:latin typeface="Arial Unicode MS" pitchFamily="34" charset="0"/>
-                <a:ea typeface="Arial Unicode MS" pitchFamily="34" charset="-122"/>
-                <a:cs typeface="Arial Unicode MS" pitchFamily="34" charset="-120"/>
+                <a:latin typeface="Apple SD Gothic Neo" pitchFamily="34" charset="0"/>
+                <a:ea typeface="Apple SD Gothic Neo" pitchFamily="34" charset="-122"/>
+                <a:cs typeface="Apple SD Gothic Neo" pitchFamily="34" charset="-120"/>
               </a:rPr>
               <a:t>현재 선택은 부족함이 아니라, 시연 목표에 맞춘 우선순위입니다.</a:t>
             </a:r>
@@ -3357,9 +3357,9 @@
                 <a:solidFill>
                   <a:srgbClr val="2B77E5"/>
                 </a:solidFill>
-                <a:latin typeface="Arial Unicode MS" pitchFamily="34" charset="0"/>
-                <a:ea typeface="Arial Unicode MS" pitchFamily="34" charset="-122"/>
-                <a:cs typeface="Arial Unicode MS" pitchFamily="34" charset="-120"/>
+                <a:latin typeface="Apple SD Gothic Neo" pitchFamily="34" charset="0"/>
+                <a:ea typeface="Apple SD Gothic Neo" pitchFamily="34" charset="-122"/>
+                <a:cs typeface="Apple SD Gothic Neo" pitchFamily="34" charset="-120"/>
               </a:rPr>
               <a:t>NEXT HARDWARE</a:t>
             </a:r>
@@ -3398,9 +3398,9 @@
                 <a:solidFill>
                   <a:srgbClr val="9AA7B7"/>
                 </a:solidFill>
-                <a:latin typeface="Arial Unicode MS" pitchFamily="34" charset="0"/>
-                <a:ea typeface="Arial Unicode MS" pitchFamily="34" charset="-122"/>
-                <a:cs typeface="Arial Unicode MS" pitchFamily="34" charset="-120"/>
+                <a:latin typeface="Apple SD Gothic Neo" pitchFamily="34" charset="0"/>
+                <a:ea typeface="Apple SD Gothic Neo" pitchFamily="34" charset="-122"/>
+                <a:cs typeface="Apple SD Gothic Neo" pitchFamily="34" charset="-120"/>
               </a:rPr>
               <a:t>BEUM  /  02</a:t>
             </a:r>
@@ -3439,9 +3439,9 @@
                 <a:solidFill>
                   <a:srgbClr val="0D2138"/>
                 </a:solidFill>
-                <a:latin typeface="Arial Unicode MS" pitchFamily="34" charset="0"/>
-                <a:ea typeface="Arial Unicode MS" pitchFamily="34" charset="-122"/>
-                <a:cs typeface="Arial Unicode MS" pitchFamily="34" charset="-120"/>
+                <a:latin typeface="Apple SD Gothic Neo" pitchFamily="34" charset="0"/>
+                <a:ea typeface="Apple SD Gothic Neo" pitchFamily="34" charset="-122"/>
+                <a:cs typeface="Apple SD Gothic Neo" pitchFamily="34" charset="-120"/>
               </a:rPr>
               <a:t>현재 3D 프린터 모델링에서</a:t>
             </a:r>
@@ -3456,9 +3456,9 @@
                 <a:solidFill>
                   <a:srgbClr val="0D2138"/>
                 </a:solidFill>
-                <a:latin typeface="Arial Unicode MS" pitchFamily="34" charset="0"/>
-                <a:ea typeface="Arial Unicode MS" pitchFamily="34" charset="-122"/>
-                <a:cs typeface="Arial Unicode MS" pitchFamily="34" charset="-120"/>
+                <a:latin typeface="Apple SD Gothic Neo" pitchFamily="34" charset="0"/>
+                <a:ea typeface="Apple SD Gothic Neo" pitchFamily="34" charset="-122"/>
+                <a:cs typeface="Apple SD Gothic Neo" pitchFamily="34" charset="-120"/>
               </a:rPr>
               <a:t>제품형 하드웨어로</a:t>
             </a:r>
@@ -3497,9 +3497,9 @@
                 <a:solidFill>
                   <a:srgbClr val="66758A"/>
                 </a:solidFill>
-                <a:latin typeface="Arial Unicode MS" pitchFamily="34" charset="0"/>
-                <a:ea typeface="Arial Unicode MS" pitchFamily="34" charset="-122"/>
-                <a:cs typeface="Arial Unicode MS" pitchFamily="34" charset="-120"/>
+                <a:latin typeface="Apple SD Gothic Neo" pitchFamily="34" charset="0"/>
+                <a:ea typeface="Apple SD Gothic Neo" pitchFamily="34" charset="-122"/>
+                <a:cs typeface="Apple SD Gothic Neo" pitchFamily="34" charset="-120"/>
               </a:rPr>
               <a:t>실제 제작한 케이스를 출발점으로, 탐지 안정성과 현장 내구성을 단계적으로 높입니다.</a:t>
             </a:r>
@@ -3567,9 +3567,9 @@
                 <a:solidFill>
                   <a:srgbClr val="9DB7D4"/>
                 </a:solidFill>
-                <a:latin typeface="Arial Unicode MS" pitchFamily="34" charset="0"/>
-                <a:ea typeface="Arial Unicode MS" pitchFamily="34" charset="-122"/>
-                <a:cs typeface="Arial Unicode MS" pitchFamily="34" charset="-120"/>
+                <a:latin typeface="Apple SD Gothic Neo" pitchFamily="34" charset="0"/>
+                <a:ea typeface="Apple SD Gothic Neo" pitchFamily="34" charset="-122"/>
+                <a:cs typeface="Apple SD Gothic Neo" pitchFamily="34" charset="-120"/>
               </a:rPr>
               <a:t>ACTUAL PROTOTYPE</a:t>
             </a:r>
@@ -3608,9 +3608,9 @@
                 <a:solidFill>
                   <a:srgbClr val="FFFFFF"/>
                 </a:solidFill>
-                <a:latin typeface="Arial Unicode MS" pitchFamily="34" charset="0"/>
-                <a:ea typeface="Arial Unicode MS" pitchFamily="34" charset="-122"/>
-                <a:cs typeface="Arial Unicode MS" pitchFamily="34" charset="-120"/>
+                <a:latin typeface="Apple SD Gothic Neo" pitchFamily="34" charset="0"/>
+                <a:ea typeface="Apple SD Gothic Neo" pitchFamily="34" charset="-122"/>
+                <a:cs typeface="Apple SD Gothic Neo" pitchFamily="34" charset="-120"/>
               </a:rPr>
               <a:t>3D 프린터 케이스 모델링</a:t>
             </a:r>
@@ -3784,9 +3784,9 @@
                 <a:solidFill>
                   <a:srgbClr val="12B6A4"/>
                 </a:solidFill>
-                <a:latin typeface="Arial Unicode MS" pitchFamily="34" charset="0"/>
-                <a:ea typeface="Arial Unicode MS" pitchFamily="34" charset="-122"/>
-                <a:cs typeface="Arial Unicode MS" pitchFamily="34" charset="-120"/>
+                <a:latin typeface="Apple SD Gothic Neo" pitchFamily="34" charset="0"/>
+                <a:ea typeface="Apple SD Gothic Neo" pitchFamily="34" charset="-122"/>
+                <a:cs typeface="Apple SD Gothic Neo" pitchFamily="34" charset="-120"/>
               </a:rPr>
               <a:t>조립도</a:t>
             </a:r>
@@ -3825,9 +3825,9 @@
                 <a:solidFill>
                   <a:srgbClr val="C9D8E8"/>
                 </a:solidFill>
-                <a:latin typeface="Arial Unicode MS" pitchFamily="34" charset="0"/>
-                <a:ea typeface="Arial Unicode MS" pitchFamily="34" charset="-122"/>
-                <a:cs typeface="Arial Unicode MS" pitchFamily="34" charset="-120"/>
+                <a:latin typeface="Apple SD Gothic Neo" pitchFamily="34" charset="0"/>
+                <a:ea typeface="Apple SD Gothic Neo" pitchFamily="34" charset="-122"/>
+                <a:cs typeface="Apple SD Gothic Neo" pitchFamily="34" charset="-120"/>
               </a:rPr>
               <a:t>실제 출력 케이스의</a:t>
             </a:r>
@@ -3842,9 +3842,9 @@
                 <a:solidFill>
                   <a:srgbClr val="C9D8E8"/>
                 </a:solidFill>
-                <a:latin typeface="Arial Unicode MS" pitchFamily="34" charset="0"/>
-                <a:ea typeface="Arial Unicode MS" pitchFamily="34" charset="-122"/>
-                <a:cs typeface="Arial Unicode MS" pitchFamily="34" charset="-120"/>
+                <a:latin typeface="Apple SD Gothic Neo" pitchFamily="34" charset="0"/>
+                <a:ea typeface="Apple SD Gothic Neo" pitchFamily="34" charset="-122"/>
+                <a:cs typeface="Apple SD Gothic Neo" pitchFamily="34" charset="-120"/>
               </a:rPr>
               <a:t>배치·조립 가능성 확인</a:t>
             </a:r>
@@ -3910,9 +3910,9 @@
                 <a:solidFill>
                   <a:srgbClr val="FFFFFF"/>
                 </a:solidFill>
-                <a:latin typeface="Arial Unicode MS" pitchFamily="34" charset="0"/>
-                <a:ea typeface="Arial Unicode MS" pitchFamily="34" charset="-122"/>
-                <a:cs typeface="Arial Unicode MS" pitchFamily="34" charset="-120"/>
+                <a:latin typeface="Apple SD Gothic Neo" pitchFamily="34" charset="0"/>
+                <a:ea typeface="Apple SD Gothic Neo" pitchFamily="34" charset="-122"/>
+                <a:cs typeface="Apple SD Gothic Neo" pitchFamily="34" charset="-120"/>
               </a:rPr>
               <a:t>카메라 장착부</a:t>
             </a:r>
@@ -3978,9 +3978,9 @@
                 <a:solidFill>
                   <a:srgbClr val="FFFFFF"/>
                 </a:solidFill>
-                <a:latin typeface="Arial Unicode MS" pitchFamily="34" charset="0"/>
-                <a:ea typeface="Arial Unicode MS" pitchFamily="34" charset="-122"/>
-                <a:cs typeface="Arial Unicode MS" pitchFamily="34" charset="-120"/>
+                <a:latin typeface="Apple SD Gothic Neo" pitchFamily="34" charset="0"/>
+                <a:ea typeface="Apple SD Gothic Neo" pitchFamily="34" charset="-122"/>
+                <a:cs typeface="Apple SD Gothic Neo" pitchFamily="34" charset="-120"/>
               </a:rPr>
               <a:t>전자부 수납</a:t>
             </a:r>
@@ -4046,9 +4046,9 @@
                 <a:solidFill>
                   <a:srgbClr val="FFFFFF"/>
                 </a:solidFill>
-                <a:latin typeface="Arial Unicode MS" pitchFamily="34" charset="0"/>
-                <a:ea typeface="Arial Unicode MS" pitchFamily="34" charset="-122"/>
-                <a:cs typeface="Arial Unicode MS" pitchFamily="34" charset="-120"/>
+                <a:latin typeface="Apple SD Gothic Neo" pitchFamily="34" charset="0"/>
+                <a:ea typeface="Apple SD Gothic Neo" pitchFamily="34" charset="-122"/>
+                <a:cs typeface="Apple SD Gothic Neo" pitchFamily="34" charset="-120"/>
               </a:rPr>
               <a:t>분해·조립 구조</a:t>
             </a:r>
@@ -4114,9 +4114,9 @@
                 <a:solidFill>
                   <a:srgbClr val="0D2138"/>
                 </a:solidFill>
-                <a:latin typeface="Arial Unicode MS" pitchFamily="34" charset="0"/>
-                <a:ea typeface="Arial Unicode MS" pitchFamily="34" charset="-122"/>
-                <a:cs typeface="Arial Unicode MS" pitchFamily="34" charset="-120"/>
+                <a:latin typeface="Apple SD Gothic Neo" pitchFamily="34" charset="0"/>
+                <a:ea typeface="Apple SD Gothic Neo" pitchFamily="34" charset="-122"/>
+                <a:cs typeface="Apple SD Gothic Neo" pitchFamily="34" charset="-120"/>
               </a:rPr>
               <a:t>3단계 고도화 로드맵</a:t>
             </a:r>
@@ -4207,9 +4207,9 @@
                 <a:solidFill>
                   <a:srgbClr val="2B77E5"/>
                 </a:solidFill>
-                <a:latin typeface="Arial Unicode MS" pitchFamily="34" charset="0"/>
-                <a:ea typeface="Arial Unicode MS" pitchFamily="34" charset="-122"/>
-                <a:cs typeface="Arial Unicode MS" pitchFamily="34" charset="-120"/>
+                <a:latin typeface="Apple SD Gothic Neo" pitchFamily="34" charset="0"/>
+                <a:ea typeface="Apple SD Gothic Neo" pitchFamily="34" charset="-122"/>
+                <a:cs typeface="Apple SD Gothic Neo" pitchFamily="34" charset="-120"/>
               </a:rPr>
               <a:t>01</a:t>
             </a:r>
@@ -4248,9 +4248,9 @@
                 <a:solidFill>
                   <a:srgbClr val="0D2138"/>
                 </a:solidFill>
-                <a:latin typeface="Arial Unicode MS" pitchFamily="34" charset="0"/>
-                <a:ea typeface="Arial Unicode MS" pitchFamily="34" charset="-122"/>
-                <a:cs typeface="Arial Unicode MS" pitchFamily="34" charset="-120"/>
+                <a:latin typeface="Apple SD Gothic Neo" pitchFamily="34" charset="0"/>
+                <a:ea typeface="Apple SD Gothic Neo" pitchFamily="34" charset="-122"/>
+                <a:cs typeface="Apple SD Gothic Neo" pitchFamily="34" charset="-120"/>
               </a:rPr>
               <a:t>탐지 보완</a:t>
             </a:r>
@@ -4289,9 +4289,9 @@
                 <a:solidFill>
                   <a:srgbClr val="66758A"/>
                 </a:solidFill>
-                <a:latin typeface="Arial Unicode MS" pitchFamily="34" charset="0"/>
-                <a:ea typeface="Arial Unicode MS" pitchFamily="34" charset="-122"/>
-                <a:cs typeface="Arial Unicode MS" pitchFamily="34" charset="-120"/>
+                <a:latin typeface="Apple SD Gothic Neo" pitchFamily="34" charset="0"/>
+                <a:ea typeface="Apple SD Gothic Neo" pitchFamily="34" charset="-122"/>
+                <a:cs typeface="Apple SD Gothic Neo" pitchFamily="34" charset="-120"/>
               </a:rPr>
               <a:t>카메라 각도·사각지대 점검</a:t>
             </a:r>
@@ -4306,9 +4306,9 @@
                 <a:solidFill>
                   <a:srgbClr val="66758A"/>
                 </a:solidFill>
-                <a:latin typeface="Arial Unicode MS" pitchFamily="34" charset="0"/>
-                <a:ea typeface="Arial Unicode MS" pitchFamily="34" charset="-122"/>
-                <a:cs typeface="Arial Unicode MS" pitchFamily="34" charset="-120"/>
+                <a:latin typeface="Apple SD Gothic Neo" pitchFamily="34" charset="0"/>
+                <a:ea typeface="Apple SD Gothic Neo" pitchFamily="34" charset="-122"/>
+                <a:cs typeface="Apple SD Gothic Neo" pitchFamily="34" charset="-120"/>
               </a:rPr>
               <a:t>수위 센서 연계 및 점검 필요 분리</a:t>
             </a:r>
@@ -4399,9 +4399,9 @@
                 <a:solidFill>
                   <a:srgbClr val="12B6A4"/>
                 </a:solidFill>
-                <a:latin typeface="Arial Unicode MS" pitchFamily="34" charset="0"/>
-                <a:ea typeface="Arial Unicode MS" pitchFamily="34" charset="-122"/>
-                <a:cs typeface="Arial Unicode MS" pitchFamily="34" charset="-120"/>
+                <a:latin typeface="Apple SD Gothic Neo" pitchFamily="34" charset="0"/>
+                <a:ea typeface="Apple SD Gothic Neo" pitchFamily="34" charset="-122"/>
+                <a:cs typeface="Apple SD Gothic Neo" pitchFamily="34" charset="-120"/>
               </a:rPr>
               <a:t>02</a:t>
             </a:r>
@@ -4440,9 +4440,9 @@
                 <a:solidFill>
                   <a:srgbClr val="0D2138"/>
                 </a:solidFill>
-                <a:latin typeface="Arial Unicode MS" pitchFamily="34" charset="0"/>
-                <a:ea typeface="Arial Unicode MS" pitchFamily="34" charset="-122"/>
-                <a:cs typeface="Arial Unicode MS" pitchFamily="34" charset="-120"/>
+                <a:latin typeface="Apple SD Gothic Neo" pitchFamily="34" charset="0"/>
+                <a:ea typeface="Apple SD Gothic Neo" pitchFamily="34" charset="-122"/>
+                <a:cs typeface="Apple SD Gothic Neo" pitchFamily="34" charset="-120"/>
               </a:rPr>
               <a:t>현장 내구성</a:t>
             </a:r>
@@ -4481,9 +4481,9 @@
                 <a:solidFill>
                   <a:srgbClr val="66758A"/>
                 </a:solidFill>
-                <a:latin typeface="Arial Unicode MS" pitchFamily="34" charset="0"/>
-                <a:ea typeface="Arial Unicode MS" pitchFamily="34" charset="-122"/>
-                <a:cs typeface="Arial Unicode MS" pitchFamily="34" charset="-120"/>
+                <a:latin typeface="Apple SD Gothic Neo" pitchFamily="34" charset="0"/>
+                <a:ea typeface="Apple SD Gothic Neo" pitchFamily="34" charset="-122"/>
+                <a:cs typeface="Apple SD Gothic Neo" pitchFamily="34" charset="-120"/>
               </a:rPr>
               <a:t>출력 케이스를 전용 하우징으로</a:t>
             </a:r>
@@ -4498,9 +4498,9 @@
                 <a:solidFill>
                   <a:srgbClr val="66758A"/>
                 </a:solidFill>
-                <a:latin typeface="Arial Unicode MS" pitchFamily="34" charset="0"/>
-                <a:ea typeface="Arial Unicode MS" pitchFamily="34" charset="-122"/>
-                <a:cs typeface="Arial Unicode MS" pitchFamily="34" charset="-120"/>
+                <a:latin typeface="Apple SD Gothic Neo" pitchFamily="34" charset="0"/>
+                <a:ea typeface="Apple SD Gothic Neo" pitchFamily="34" charset="-122"/>
+                <a:cs typeface="Apple SD Gothic Neo" pitchFamily="34" charset="-120"/>
               </a:rPr>
               <a:t>전원·통신·watchdog 보완</a:t>
             </a:r>
@@ -4591,9 +4591,9 @@
                 <a:solidFill>
                   <a:srgbClr val="946A00"/>
                 </a:solidFill>
-                <a:latin typeface="Arial Unicode MS" pitchFamily="34" charset="0"/>
-                <a:ea typeface="Arial Unicode MS" pitchFamily="34" charset="-122"/>
-                <a:cs typeface="Arial Unicode MS" pitchFamily="34" charset="-120"/>
+                <a:latin typeface="Apple SD Gothic Neo" pitchFamily="34" charset="0"/>
+                <a:ea typeface="Apple SD Gothic Neo" pitchFamily="34" charset="-122"/>
+                <a:cs typeface="Apple SD Gothic Neo" pitchFamily="34" charset="-120"/>
               </a:rPr>
               <a:t>03</a:t>
             </a:r>
@@ -4632,9 +4632,9 @@
                 <a:solidFill>
                   <a:srgbClr val="0D2138"/>
                 </a:solidFill>
-                <a:latin typeface="Arial Unicode MS" pitchFamily="34" charset="0"/>
-                <a:ea typeface="Arial Unicode MS" pitchFamily="34" charset="-122"/>
-                <a:cs typeface="Arial Unicode MS" pitchFamily="34" charset="-120"/>
+                <a:latin typeface="Apple SD Gothic Neo" pitchFamily="34" charset="0"/>
+                <a:ea typeface="Apple SD Gothic Neo" pitchFamily="34" charset="-122"/>
+                <a:cs typeface="Apple SD Gothic Neo" pitchFamily="34" charset="-120"/>
               </a:rPr>
               <a:t>운영 검증</a:t>
             </a:r>
@@ -4673,9 +4673,9 @@
                 <a:solidFill>
                   <a:srgbClr val="66758A"/>
                 </a:solidFill>
-                <a:latin typeface="Arial Unicode MS" pitchFamily="34" charset="0"/>
-                <a:ea typeface="Arial Unicode MS" pitchFamily="34" charset="-122"/>
-                <a:cs typeface="Arial Unicode MS" pitchFamily="34" charset="-120"/>
+                <a:latin typeface="Apple SD Gothic Neo" pitchFamily="34" charset="0"/>
+                <a:ea typeface="Apple SD Gothic Neo" pitchFamily="34" charset="-122"/>
+                <a:cs typeface="Apple SD Gothic Neo" pitchFamily="34" charset="-120"/>
               </a:rPr>
               <a:t>장기 실증·유지보수</a:t>
             </a:r>
@@ -4690,9 +4690,9 @@
                 <a:solidFill>
                   <a:srgbClr val="66758A"/>
                 </a:solidFill>
-                <a:latin typeface="Arial Unicode MS" pitchFamily="34" charset="0"/>
-                <a:ea typeface="Arial Unicode MS" pitchFamily="34" charset="-122"/>
-                <a:cs typeface="Arial Unicode MS" pitchFamily="34" charset="-120"/>
+                <a:latin typeface="Apple SD Gothic Neo" pitchFamily="34" charset="0"/>
+                <a:ea typeface="Apple SD Gothic Neo" pitchFamily="34" charset="-122"/>
+                <a:cs typeface="Apple SD Gothic Neo" pitchFamily="34" charset="-120"/>
               </a:rPr>
               <a:t>제품 인증·양산성 검토</a:t>
             </a:r>
@@ -4760,9 +4760,9 @@
                 <a:solidFill>
                   <a:srgbClr val="FFFFFF"/>
                 </a:solidFill>
-                <a:latin typeface="Arial Unicode MS" pitchFamily="34" charset="0"/>
-                <a:ea typeface="Arial Unicode MS" pitchFamily="34" charset="-122"/>
-                <a:cs typeface="Arial Unicode MS" pitchFamily="34" charset="-120"/>
+                <a:latin typeface="Apple SD Gothic Neo" pitchFamily="34" charset="0"/>
+                <a:ea typeface="Apple SD Gothic Neo" pitchFamily="34" charset="-122"/>
+                <a:cs typeface="Apple SD Gothic Neo" pitchFamily="34" charset="-120"/>
               </a:rPr>
               <a:t>현재 모델링을 실제 현장형 제품으로 확장</a:t>
             </a:r>
@@ -4801,9 +4801,9 @@
                 <a:solidFill>
                   <a:srgbClr val="2B77E5"/>
                 </a:solidFill>
-                <a:latin typeface="Arial Unicode MS" pitchFamily="34" charset="0"/>
-                <a:ea typeface="Arial Unicode MS" pitchFamily="34" charset="-122"/>
-                <a:cs typeface="Arial Unicode MS" pitchFamily="34" charset="-120"/>
+                <a:latin typeface="Apple SD Gothic Neo" pitchFamily="34" charset="0"/>
+                <a:ea typeface="Apple SD Gothic Neo" pitchFamily="34" charset="-122"/>
+                <a:cs typeface="Apple SD Gothic Neo" pitchFamily="34" charset="-120"/>
               </a:rPr>
               <a:t>탐지 가능한 장치  →  판단 가능한 시스템</a:t>
             </a:r>
@@ -4842,9 +4842,9 @@
                 <a:solidFill>
                   <a:srgbClr val="9AA7B7"/>
                 </a:solidFill>
-                <a:latin typeface="Arial Unicode MS" pitchFamily="34" charset="0"/>
-                <a:ea typeface="Arial Unicode MS" pitchFamily="34" charset="-122"/>
-                <a:cs typeface="Arial Unicode MS" pitchFamily="34" charset="-120"/>
+                <a:latin typeface="Apple SD Gothic Neo" pitchFamily="34" charset="0"/>
+                <a:ea typeface="Apple SD Gothic Neo" pitchFamily="34" charset="-122"/>
+                <a:cs typeface="Apple SD Gothic Neo" pitchFamily="34" charset="-120"/>
               </a:rPr>
               <a:t>현재 모델링은 기능·장착 가능성 검증의 결과입니다.</a:t>
             </a:r>
@@ -4903,7 +4903,7 @@
     </a:clrScheme>
     <a:fontScheme name="Office">
       <a:majorFont>
-        <a:latin typeface="Arial Unicode MS"/>
+        <a:latin typeface="Apple SD Gothic Neo"/>
         <a:ea typeface=""/>
         <a:cs typeface=""/>
         <a:font script="Jpan" typeface="游ゴシック Light"/>
@@ -4955,7 +4955,7 @@
         <a:font script="Tfng" typeface="Ebrima"/>
       </a:majorFont>
       <a:minorFont>
-        <a:latin typeface="Arial Unicode MS"/>
+        <a:latin typeface="Apple SD Gothic Neo"/>
         <a:ea typeface=""/>
         <a:cs typeface=""/>
         <a:font script="Jpan" typeface="游ゴシック"/>
